--- a/generated_presentation.pptx
+++ b/generated_presentation.pptx
@@ -8,6 +8,8 @@
     <p:sldId id="256" r:id="rId7"/>
     <p:sldId id="257" r:id="rId8"/>
     <p:sldId id="258" r:id="rId9"/>
+    <p:sldId id="259" r:id="rId10"/>
+    <p:sldId id="260" r:id="rId11"/>
   </p:sldIdLst>
   <p:sldSz cx="9144000" cy="6858000" type="screen4x3"/>
   <p:notesSz cx="6858000" cy="9144000"/>
@@ -3106,7 +3108,7 @@
           <a:lstStyle/>
           <a:p>
             <a:r>
-              <a:t>Introduction to Information</a:t>
+              <a:t>Introduction to Software Engineering</a:t>
             </a:r>
           </a:p>
         </p:txBody>
@@ -3127,17 +3129,17 @@
           <a:lstStyle/>
           <a:p>
             <a:r>
-              <a:t>* Information refers to knowledge or facts learned, discovered, or communicated about a particular subject or situation</a:t>
-            </a:r>
-          </a:p>
-          <a:p>
-            <a:r>
-              <a:t>* It can be in the form of data, messages, or instructions that provide understanding or insight</a:t>
-            </a:r>
-          </a:p>
-          <a:p>
-            <a:r>
-              <a:t>* Information is a vital component of decision-making, problem-solving, and learning in various aspects of life</a:t>
+              <a:t>* Software engineering is the application of engineering principles and techniques to the design, development, testing, and maintenance of software systems</a:t>
+            </a:r>
+          </a:p>
+          <a:p>
+            <a:r>
+              <a:t>* It involves a systematic and disciplined approach to software development, ensuring that software is reliable, efficient, and meets the required specifications</a:t>
+            </a:r>
+          </a:p>
+          <a:p>
+            <a:r>
+              <a:t>* Software engineering encompasses a broad range of activities, including requirements gathering, design, implementation, testing, and deployment</a:t>
             </a:r>
           </a:p>
         </p:txBody>
@@ -3176,7 +3178,7 @@
           <a:lstStyle/>
           <a:p>
             <a:r>
-              <a:t>Characteristics of Information</a:t>
+              <a:t>Software Engineering Principles</a:t>
             </a:r>
           </a:p>
         </p:txBody>
@@ -3197,17 +3199,17 @@
           <a:lstStyle/>
           <a:p>
             <a:r>
-              <a:t>* Information is relevant and useful, providing value to the recipient or user</a:t>
-            </a:r>
-          </a:p>
-          <a:p>
-            <a:r>
-              <a:t>* It is accurate and reliable, free from errors or biases that could mislead or misinform</a:t>
-            </a:r>
-          </a:p>
-          <a:p>
-            <a:r>
-              <a:t>* Information is timely and up-to-date, reflecting the current state of knowledge or circumstances</a:t>
+              <a:t>* Abstraction: focusing on essential features and hiding non-essential details to simplify software development and maintenance</a:t>
+            </a:r>
+          </a:p>
+          <a:p>
+            <a:r>
+              <a:t>* Modularity: breaking down software into smaller, independent modules to improve flexibility, scalability, and reusability</a:t>
+            </a:r>
+          </a:p>
+          <a:p>
+            <a:r>
+              <a:t>* Separation of Concerns: dividing software into distinct components, each responsible for a specific aspect of the system, to reduce complexity and improve maintainability</a:t>
             </a:r>
           </a:p>
         </p:txBody>
@@ -3246,7 +3248,7 @@
           <a:lstStyle/>
           <a:p>
             <a:r>
-              <a:t>Types and Sources of Information</a:t>
+              <a:t>Software Development Life Cycle</a:t>
             </a:r>
           </a:p>
         </p:txBody>
@@ -3267,17 +3269,172 @@
           <a:lstStyle/>
           <a:p>
             <a:r>
-              <a:t>* There are various types of information, including factual, analytical, and evaluative information</a:t>
-            </a:r>
-          </a:p>
-          <a:p>
-            <a:r>
-              <a:t>* Information can come from diverse sources, such as books, articles, online resources, and personal experiences</a:t>
-            </a:r>
-          </a:p>
-          <a:p>
-            <a:r>
-              <a:t>* The quality and credibility of information depend on the source, methodology, and context in which it is presented or acquired</a:t>
+              <a:t>* Requirements gathering: identifying and documenting the functional and non-functional requirements of the software system</a:t>
+            </a:r>
+          </a:p>
+          <a:p>
+            <a:r>
+              <a:t>* Design: creating a detailed design of the software system, including architecture, components, and interfaces</a:t>
+            </a:r>
+          </a:p>
+          <a:p>
+            <a:r>
+              <a:t>* Implementation: writing the code and developing the software system, using programming languages and development tools</a:t>
+            </a:r>
+          </a:p>
+          <a:p>
+            <a:r>
+              <a:t>* Testing: verifying that the software system meets the required specifications and is free from defects</a:t>
+            </a:r>
+          </a:p>
+        </p:txBody>
+      </p:sp>
+    </p:spTree>
+  </p:cSld>
+  <p:clrMapOvr>
+    <a:masterClrMapping/>
+  </p:clrMapOvr>
+</p:sld>
+</file>
+
+<file path=ppt/slides/slide4.xml><?xml version="1.0" encoding="utf-8"?>
+<p:sld xmlns:a="http://schemas.openxmlformats.org/drawingml/2006/main" xmlns:p="http://schemas.openxmlformats.org/presentationml/2006/main" xmlns:r="http://schemas.openxmlformats.org/officeDocument/2006/relationships">
+  <p:cSld>
+    <p:spTree>
+      <p:nvGrpSpPr>
+        <p:cNvPr id="1" name=""/>
+        <p:cNvGrpSpPr/>
+        <p:nvPr/>
+      </p:nvGrpSpPr>
+      <p:grpSpPr/>
+      <p:sp>
+        <p:nvSpPr>
+          <p:cNvPr id="2" name="Title 1"/>
+          <p:cNvSpPr>
+            <a:spLocks noGrp="1"/>
+          </p:cNvSpPr>
+          <p:nvPr>
+            <p:ph type="title"/>
+          </p:nvPr>
+        </p:nvSpPr>
+        <p:spPr/>
+        <p:txBody>
+          <a:bodyPr/>
+          <a:lstStyle/>
+          <a:p>
+            <a:r>
+              <a:t>Software Engineering Tools and Techniques</a:t>
+            </a:r>
+          </a:p>
+        </p:txBody>
+      </p:sp>
+      <p:sp>
+        <p:nvSpPr>
+          <p:cNvPr id="3" name="Content Placeholder 2"/>
+          <p:cNvSpPr>
+            <a:spLocks noGrp="1"/>
+          </p:cNvSpPr>
+          <p:nvPr>
+            <p:ph idx="1"/>
+          </p:nvPr>
+        </p:nvSpPr>
+        <p:spPr/>
+        <p:txBody>
+          <a:bodyPr/>
+          <a:lstStyle/>
+          <a:p>
+            <a:r>
+              <a:t>* Programming languages: such as Java, Python, and C++, used for writing software code</a:t>
+            </a:r>
+          </a:p>
+          <a:p>
+            <a:r>
+              <a:t>* Development frameworks: such as Spring, React, and Angular, used for building software applications</a:t>
+            </a:r>
+          </a:p>
+          <a:p>
+            <a:r>
+              <a:t>* Version control systems: such as Git, used for managing changes to software code and collaborating with team members</a:t>
+            </a:r>
+          </a:p>
+          <a:p>
+            <a:r>
+              <a:t>* Agile methodologies: such as Scrum and Kanban, used for managing software development projects and teams</a:t>
+            </a:r>
+          </a:p>
+        </p:txBody>
+      </p:sp>
+    </p:spTree>
+  </p:cSld>
+  <p:clrMapOvr>
+    <a:masterClrMapping/>
+  </p:clrMapOvr>
+</p:sld>
+</file>
+
+<file path=ppt/slides/slide5.xml><?xml version="1.0" encoding="utf-8"?>
+<p:sld xmlns:a="http://schemas.openxmlformats.org/drawingml/2006/main" xmlns:p="http://schemas.openxmlformats.org/presentationml/2006/main" xmlns:r="http://schemas.openxmlformats.org/officeDocument/2006/relationships">
+  <p:cSld>
+    <p:spTree>
+      <p:nvGrpSpPr>
+        <p:cNvPr id="1" name=""/>
+        <p:cNvGrpSpPr/>
+        <p:nvPr/>
+      </p:nvGrpSpPr>
+      <p:grpSpPr/>
+      <p:sp>
+        <p:nvSpPr>
+          <p:cNvPr id="2" name="Title 1"/>
+          <p:cNvSpPr>
+            <a:spLocks noGrp="1"/>
+          </p:cNvSpPr>
+          <p:nvPr>
+            <p:ph type="title"/>
+          </p:nvPr>
+        </p:nvSpPr>
+        <p:spPr/>
+        <p:txBody>
+          <a:bodyPr/>
+          <a:lstStyle/>
+          <a:p>
+            <a:r>
+              <a:t>Career Opportunities in Software Engineering</a:t>
+            </a:r>
+          </a:p>
+        </p:txBody>
+      </p:sp>
+      <p:sp>
+        <p:nvSpPr>
+          <p:cNvPr id="3" name="Content Placeholder 2"/>
+          <p:cNvSpPr>
+            <a:spLocks noGrp="1"/>
+          </p:cNvSpPr>
+          <p:nvPr>
+            <p:ph idx="1"/>
+          </p:nvPr>
+        </p:nvSpPr>
+        <p:spPr/>
+        <p:txBody>
+          <a:bodyPr/>
+          <a:lstStyle/>
+          <a:p>
+            <a:r>
+              <a:t>* Software developer: designing, developing, and testing software systems, and collaborating with cross-functional teams</a:t>
+            </a:r>
+          </a:p>
+          <a:p>
+            <a:r>
+              <a:t>* Technical lead: leading technical teams, overseeing software development projects, and ensuring that software is delivered on time and within budget</a:t>
+            </a:r>
+          </a:p>
+          <a:p>
+            <a:r>
+              <a:t>* Software architect: designing and implementing software architectures, and ensuring that software systems meet the required specifications and are scalable and maintainable</a:t>
+            </a:r>
+          </a:p>
+          <a:p>
+            <a:r>
+              <a:t>* DevOps engineer: ensuring the smooth operation of software systems, and collaborating with development and operations teams to improve software quality and reliability</a:t>
             </a:r>
           </a:p>
         </p:txBody>
